--- a/EDM-V13-MASTER/10-Capability-Deck/EDM-Holdings-Capability-Deck.pptx
+++ b/EDM-V13-MASTER/10-Capability-Deck/EDM-Holdings-Capability-Deck.pptx
@@ -6874,7 +6874,7 @@
                 <a:ea typeface="Montserrat" pitchFamily="34" charset="-122"/>
                 <a:cs typeface="Montserrat" pitchFamily="34" charset="-120"/>
               </a:rPr>
-              <a:t>We work as a specialist interior package partner to leading main contractors, including:</a:t>
+              <a:t>We work as a specialist interior package partner to Tier-1 main contractors and consultancies, across four sectors:</a:t>
             </a:r>
             <a:endParaRPr lang="en-US" sz="1400" dirty="0"/>
           </a:p>
@@ -6994,7 +6994,7 @@
                 <a:ea typeface="Montserrat" pitchFamily="34" charset="-122"/>
                 <a:cs typeface="Montserrat" pitchFamily="34" charset="-120"/>
               </a:rPr>
-              <a:t>Gilbert-Ash</a:t>
+              <a:t>Residential</a:t>
             </a:r>
             <a:endParaRPr lang="en-US" sz="1150" dirty="0"/>
           </a:p>
@@ -7114,7 +7114,7 @@
                 <a:ea typeface="Montserrat" pitchFamily="34" charset="-122"/>
                 <a:cs typeface="Montserrat" pitchFamily="34" charset="-120"/>
               </a:rPr>
-              <a:t>Graham</a:t>
+              <a:t>Workplace</a:t>
             </a:r>
             <a:endParaRPr lang="en-US" sz="1150" dirty="0"/>
           </a:p>
@@ -7234,7 +7234,7 @@
                 <a:ea typeface="Montserrat" pitchFamily="34" charset="-122"/>
                 <a:cs typeface="Montserrat" pitchFamily="34" charset="-120"/>
               </a:rPr>
-              <a:t>John Sisk &amp; Son</a:t>
+              <a:t>Hotels and leisure</a:t>
             </a:r>
             <a:endParaRPr lang="en-US" sz="1150" dirty="0"/>
           </a:p>
@@ -7354,7 +7354,7 @@
                 <a:ea typeface="Montserrat" pitchFamily="34" charset="-122"/>
                 <a:cs typeface="Montserrat" pitchFamily="34" charset="-120"/>
               </a:rPr>
-              <a:t>McLaughlin &amp; Harvey</a:t>
+              <a:t>Education</a:t>
             </a:r>
             <a:endParaRPr lang="en-US" sz="1150" dirty="0"/>
           </a:p>
@@ -7458,26 +7458,6 @@
         <p:txBody>
           <a:bodyPr wrap="square" lIns="0" tIns="0" rIns="0" bIns="0" rtlCol="0" anchor="ctr"/>
           <a:lstStyle/>
-          <a:p>
-            <a:pPr algn="ctr" indent="0" marL="0">
-              <a:lnSpc>
-                <a:spcPct val="100000"/>
-              </a:lnSpc>
-              <a:buNone/>
-            </a:pPr>
-            <a:r>
-              <a:rPr lang="en-US" sz="1150" b="1" dirty="0">
-                <a:solidFill>
-                  <a:srgbClr val="13211A"/>
-                </a:solidFill>
-                <a:latin typeface="Montserrat" pitchFamily="34" charset="0"/>
-                <a:ea typeface="Montserrat" pitchFamily="34" charset="-122"/>
-                <a:cs typeface="Montserrat" pitchFamily="34" charset="-120"/>
-              </a:rPr>
-              <a:t>Farrans</a:t>
-            </a:r>
-            <a:endParaRPr lang="en-US" sz="1150" dirty="0"/>
-          </a:p>
         </p:txBody>
       </p:sp>
       <p:sp>
@@ -7513,7 +7493,7 @@
                 <a:ea typeface="Montserrat" pitchFamily="34" charset="-122"/>
                 <a:cs typeface="Montserrat" pitchFamily="34" charset="-120"/>
               </a:rPr>
-              <a:t>References available on request, package-by-package, for prequalification.</a:t>
+              <a:t>We do not publish a client list. Where a client requires consent before being named we ask them first. Package-specific references on request.</a:t>
             </a:r>
             <a:endParaRPr lang="en-US" sz="1100" dirty="0"/>
           </a:p>
